--- a/examples/demo_data_analysis.pptx
+++ b/examples/demo_data_analysis.pptx
@@ -12717,7 +12717,7 @@
                 <a:ea typeface="微软雅黑"/>
                 <a:cs typeface="微软雅黑"/>
               </a:rPr>
-              <a:t>二、问题诊断：宽带渗透率下滑的原因</a:t>
+              <a:t>二、问题诊断：拆机上升是渗透率下滑的首因</a:t>
             </a:r>
             <a:endParaRPr sz="3000"/>
           </a:p>
@@ -12880,7 +12880,66 @@
         </p:nvSpPr>
         <p:spPr>
           <a:xfrm>
-            <a:off x="274320" y="1650492"/>
+            <a:off x="274320" y="5806440"/>
+            <a:ext cx="11640312" cy="457200"/>
+          </a:xfrm>
+          <a:prstGeom prst="rect">
+            <a:avLst/>
+          </a:prstGeom>
+          <a:solidFill>
+            <a:srgbClr val="F1EBE9"/>
+          </a:solidFill>
+          <a:ln>
+            <a:noFill/>
+          </a:ln>
+        </p:spPr>
+        <p:txBody>
+          <a:bodyPr rtlCol="0" anchor="ctr" wrap="square" lIns="137160" tIns="73152" rIns="137160" bIns="73152">
+            <a:noAutofit/>
+          </a:bodyPr>
+          <a:lstStyle/>
+          <a:p>
+            <a:pPr algn="l" marL="0" indent="0">
+              <a:lnSpc>
+                <a:spcPct val="125000"/>
+              </a:lnSpc>
+              <a:buNone/>
+            </a:pPr>
+            <a:r>
+              <a:rPr lang="zh-CN" altLang="en-US" sz="1300" b="1">
+                <a:solidFill>
+                  <a:srgbClr val="262626"/>
+                </a:solidFill>
+                <a:latin typeface="微软雅黑"/>
+                <a:ea typeface="微软雅黑"/>
+                <a:cs typeface="微软雅黑"/>
+              </a:rPr>
+              <a:t>启示：</a:t>
+            </a:r>
+            <a:r>
+              <a:rPr lang="zh-CN" altLang="en-US" sz="1300" b="0">
+                <a:solidFill>
+                  <a:srgbClr val="262626"/>
+                </a:solidFill>
+                <a:latin typeface="微软雅黑"/>
+                <a:ea typeface="微软雅黑"/>
+                <a:cs typeface="微软雅黑"/>
+              </a:rPr>
+              <a:t>拆机贡献超过新装不足，四季度资源应向合约到期用户续约、装维质量提升倾斜，同时补齐C区、E县新建小区覆盖</a:t>
+            </a:r>
+            <a:endParaRPr sz="1300"/>
+          </a:p>
+        </p:txBody>
+      </p:sp>
+      <p:sp>
+        <p:nvSpPr>
+          <p:cNvPr id="7" name="Rectangle 6"/>
+          <p:cNvSpPr/>
+          <p:nvPr/>
+        </p:nvSpPr>
+        <p:spPr>
+          <a:xfrm>
+            <a:off x="274320" y="1604772"/>
             <a:ext cx="2349485" cy="365760"/>
           </a:xfrm>
           <a:prstGeom prst="rect">
@@ -12922,13 +12981,13 @@
       </p:sp>
       <p:sp>
         <p:nvSpPr>
-          <p:cNvPr id="7" name="Rectangle 6"/>
+          <p:cNvPr id="8" name="Rectangle 7"/>
           <p:cNvSpPr/>
           <p:nvPr/>
         </p:nvSpPr>
         <p:spPr>
           <a:xfrm>
-            <a:off x="3081005" y="1650492"/>
+            <a:off x="3081005" y="1604772"/>
             <a:ext cx="3064546" cy="365760"/>
           </a:xfrm>
           <a:prstGeom prst="rect">
@@ -12970,13 +13029,13 @@
       </p:sp>
       <p:sp>
         <p:nvSpPr>
-          <p:cNvPr id="8" name="Rectangle 7"/>
+          <p:cNvPr id="9" name="Rectangle 8"/>
           <p:cNvSpPr/>
           <p:nvPr/>
         </p:nvSpPr>
         <p:spPr>
           <a:xfrm>
-            <a:off x="6602752" y="1650492"/>
+            <a:off x="6602752" y="1604772"/>
             <a:ext cx="5311880" cy="365760"/>
           </a:xfrm>
           <a:prstGeom prst="rect">
@@ -13018,13 +13077,13 @@
       </p:sp>
       <p:sp>
         <p:nvSpPr>
-          <p:cNvPr id="9" name="Rectangle 8"/>
+          <p:cNvPr id="10" name="Rectangle 9"/>
           <p:cNvSpPr/>
           <p:nvPr/>
         </p:nvSpPr>
         <p:spPr>
           <a:xfrm>
-            <a:off x="274320" y="3019806"/>
+            <a:off x="274320" y="2996946"/>
             <a:ext cx="2349485" cy="1737360"/>
           </a:xfrm>
           <a:prstGeom prst="rect">
@@ -13038,14 +13097,14 @@
           </a:ln>
         </p:spPr>
         <p:txBody>
-          <a:bodyPr rtlCol="0" anchor="ctr" wrap="square" lIns="73152" tIns="43891" rIns="73152" bIns="43891">
+          <a:bodyPr rtlCol="0" anchor="ctr" wrap="square" lIns="109728" tIns="65837" rIns="109728" bIns="65837">
             <a:noAutofit/>
           </a:bodyPr>
           <a:lstStyle/>
           <a:p>
             <a:pPr algn="ctr" marL="0" indent="0">
               <a:lnSpc>
-                <a:spcPct val="120000"/>
+                <a:spcPct val="125000"/>
               </a:lnSpc>
               <a:buNone/>
             </a:pPr>
@@ -13065,7 +13124,7 @@
           <a:p>
             <a:pPr algn="ctr" marL="0" indent="0">
               <a:lnSpc>
-                <a:spcPct val="120000"/>
+                <a:spcPct val="125000"/>
               </a:lnSpc>
               <a:buNone/>
             </a:pPr>
@@ -13085,7 +13144,7 @@
           <a:p>
             <a:pPr algn="ctr" marL="0" indent="0">
               <a:lnSpc>
-                <a:spcPct val="120000"/>
+                <a:spcPct val="125000"/>
               </a:lnSpc>
               <a:buNone/>
             </a:pPr>
@@ -13105,7 +13164,7 @@
           <a:p>
             <a:pPr algn="ctr" marL="0" indent="0">
               <a:lnSpc>
-                <a:spcPct val="120000"/>
+                <a:spcPct val="125000"/>
               </a:lnSpc>
               <a:buNone/>
             </a:pPr>
@@ -13137,14 +13196,14 @@
       </p:sp>
       <p:sp>
         <p:nvSpPr>
-          <p:cNvPr id="10" name="Rectangle 9"/>
+          <p:cNvPr id="11" name="Rectangle 10"/>
           <p:cNvSpPr/>
           <p:nvPr/>
         </p:nvSpPr>
         <p:spPr>
           <a:xfrm>
-            <a:off x="3081005" y="2199132"/>
-            <a:ext cx="3064546" cy="1034796"/>
+            <a:off x="3081005" y="2107692"/>
+            <a:ext cx="3064546" cy="1080516"/>
           </a:xfrm>
           <a:prstGeom prst="rect">
             <a:avLst/>
@@ -13164,12 +13223,12 @@
           <a:p>
             <a:pPr algn="l" marL="0" indent="0">
               <a:lnSpc>
-                <a:spcPct val="115000"/>
+                <a:spcPct val="125000"/>
               </a:lnSpc>
               <a:buNone/>
             </a:pPr>
             <a:r>
-              <a:rPr lang="zh-CN" altLang="en-US" sz="1400" b="1">
+              <a:rPr lang="zh-CN" altLang="en-US" sz="1300" b="1">
                 <a:solidFill>
                   <a:srgbClr val="262626"/>
                 </a:solidFill>
@@ -13180,7 +13239,7 @@
               <a:t>新装不足</a:t>
             </a:r>
             <a:r>
-              <a:rPr lang="zh-CN" altLang="en-US" sz="1400" b="0">
+              <a:rPr lang="zh-CN" altLang="en-US" sz="1300" b="0">
                 <a:solidFill>
                   <a:srgbClr val="262626"/>
                 </a:solidFill>
@@ -13191,7 +13250,7 @@
               <a:t>　</a:t>
             </a:r>
             <a:r>
-              <a:rPr lang="zh-CN" altLang="en-US" sz="1400" b="1">
+              <a:rPr lang="zh-CN" altLang="en-US" sz="1300" b="1">
                 <a:solidFill>
                   <a:srgbClr val="008650"/>
                 </a:solidFill>
@@ -13201,20 +13260,20 @@
               </a:rPr>
               <a:t>−0.5pp</a:t>
             </a:r>
-            <a:endParaRPr sz="1400"/>
+            <a:endParaRPr sz="1300"/>
           </a:p>
         </p:txBody>
       </p:sp>
       <p:sp>
         <p:nvSpPr>
-          <p:cNvPr id="11" name="Rectangle 10"/>
+          <p:cNvPr id="12" name="Rectangle 11"/>
           <p:cNvSpPr/>
           <p:nvPr/>
         </p:nvSpPr>
         <p:spPr>
           <a:xfrm>
-            <a:off x="6602752" y="2199132"/>
-            <a:ext cx="5311880" cy="1034796"/>
+            <a:off x="6602752" y="2107692"/>
+            <a:ext cx="5311880" cy="1080516"/>
           </a:xfrm>
           <a:prstGeom prst="rect">
             <a:avLst/>
@@ -13299,14 +13358,14 @@
       </p:sp>
       <p:cxnSp>
         <p:nvCxnSpPr>
-          <p:cNvPr id="12" name="Connector 11"/>
+          <p:cNvPr id="13" name="Connector 12"/>
           <p:cNvCxnSpPr/>
           <p:nvPr/>
         </p:nvCxnSpPr>
         <p:spPr>
           <a:xfrm flipV="1">
-            <a:off x="2623805" y="2716530"/>
-            <a:ext cx="457200" cy="1171956"/>
+            <a:off x="2623805" y="2647950"/>
+            <a:ext cx="457200" cy="1217676"/>
           </a:xfrm>
           <a:prstGeom prst="line">
             <a:avLst/>
@@ -13320,13 +13379,13 @@
       </p:cxnSp>
       <p:cxnSp>
         <p:nvCxnSpPr>
-          <p:cNvPr id="13" name="Connector 12"/>
+          <p:cNvPr id="14" name="Connector 13"/>
           <p:cNvCxnSpPr/>
           <p:nvPr/>
         </p:nvCxnSpPr>
         <p:spPr>
           <a:xfrm>
-            <a:off x="6145552" y="2716530"/>
+            <a:off x="6145552" y="2647950"/>
             <a:ext cx="457200" cy="0"/>
           </a:xfrm>
           <a:prstGeom prst="line">
@@ -13342,14 +13401,14 @@
       </p:cxnSp>
       <p:sp>
         <p:nvSpPr>
-          <p:cNvPr id="14" name="Rectangle 13"/>
+          <p:cNvPr id="15" name="Rectangle 14"/>
           <p:cNvSpPr/>
           <p:nvPr/>
         </p:nvSpPr>
         <p:spPr>
           <a:xfrm>
-            <a:off x="3081005" y="3371088"/>
-            <a:ext cx="3064546" cy="1034796"/>
+            <a:off x="3081005" y="3325368"/>
+            <a:ext cx="3064546" cy="1080516"/>
           </a:xfrm>
           <a:prstGeom prst="rect">
             <a:avLst/>
@@ -13371,12 +13430,12 @@
           <a:p>
             <a:pPr algn="l" marL="0" indent="0">
               <a:lnSpc>
-                <a:spcPct val="115000"/>
+                <a:spcPct val="125000"/>
               </a:lnSpc>
               <a:buNone/>
             </a:pPr>
             <a:r>
-              <a:rPr lang="zh-CN" altLang="en-US" sz="1400" b="1">
+              <a:rPr lang="zh-CN" altLang="en-US" sz="1300" b="1">
                 <a:solidFill>
                   <a:srgbClr val="262626"/>
                 </a:solidFill>
@@ -13387,7 +13446,7 @@
               <a:t>拆机上升</a:t>
             </a:r>
             <a:r>
-              <a:rPr lang="zh-CN" altLang="en-US" sz="1400" b="0">
+              <a:rPr lang="zh-CN" altLang="en-US" sz="1300" b="0">
                 <a:solidFill>
                   <a:srgbClr val="262626"/>
                 </a:solidFill>
@@ -13398,7 +13457,7 @@
               <a:t>　</a:t>
             </a:r>
             <a:r>
-              <a:rPr lang="zh-CN" altLang="en-US" sz="1400" b="1">
+              <a:rPr lang="zh-CN" altLang="en-US" sz="1300" b="1">
                 <a:solidFill>
                   <a:srgbClr val="008650"/>
                 </a:solidFill>
@@ -13408,20 +13467,20 @@
               </a:rPr>
               <a:t>−0.6pp</a:t>
             </a:r>
-            <a:endParaRPr sz="1400"/>
+            <a:endParaRPr sz="1300"/>
           </a:p>
         </p:txBody>
       </p:sp>
       <p:sp>
         <p:nvSpPr>
-          <p:cNvPr id="15" name="Rectangle 14"/>
+          <p:cNvPr id="16" name="Rectangle 15"/>
           <p:cNvSpPr/>
           <p:nvPr/>
         </p:nvSpPr>
         <p:spPr>
           <a:xfrm>
-            <a:off x="6602752" y="3371088"/>
-            <a:ext cx="5311880" cy="1034796"/>
+            <a:off x="6602752" y="3325368"/>
+            <a:ext cx="5311880" cy="1080516"/>
           </a:xfrm>
           <a:prstGeom prst="rect">
             <a:avLst/>
@@ -13506,13 +13565,13 @@
       </p:sp>
       <p:cxnSp>
         <p:nvCxnSpPr>
-          <p:cNvPr id="16" name="Connector 15"/>
+          <p:cNvPr id="17" name="Connector 16"/>
           <p:cNvCxnSpPr/>
           <p:nvPr/>
         </p:nvCxnSpPr>
         <p:spPr>
           <a:xfrm>
-            <a:off x="2623805" y="3888486"/>
+            <a:off x="2623805" y="3865626"/>
             <a:ext cx="457200" cy="0"/>
           </a:xfrm>
           <a:prstGeom prst="line">
@@ -13527,13 +13586,13 @@
       </p:cxnSp>
       <p:cxnSp>
         <p:nvCxnSpPr>
-          <p:cNvPr id="17" name="Connector 16"/>
+          <p:cNvPr id="18" name="Connector 17"/>
           <p:cNvCxnSpPr/>
           <p:nvPr/>
         </p:nvCxnSpPr>
         <p:spPr>
           <a:xfrm>
-            <a:off x="6145552" y="3888486"/>
+            <a:off x="6145552" y="3865626"/>
             <a:ext cx="457200" cy="0"/>
           </a:xfrm>
           <a:prstGeom prst="line">
@@ -13549,14 +13608,14 @@
       </p:cxnSp>
       <p:sp>
         <p:nvSpPr>
-          <p:cNvPr id="18" name="Rectangle 17"/>
+          <p:cNvPr id="19" name="Rectangle 18"/>
           <p:cNvSpPr/>
           <p:nvPr/>
         </p:nvSpPr>
         <p:spPr>
           <a:xfrm>
             <a:off x="3081005" y="4543044"/>
-            <a:ext cx="3064546" cy="1034796"/>
+            <a:ext cx="3064546" cy="1080516"/>
           </a:xfrm>
           <a:prstGeom prst="rect">
             <a:avLst/>
@@ -13576,12 +13635,12 @@
           <a:p>
             <a:pPr algn="l" marL="0" indent="0">
               <a:lnSpc>
-                <a:spcPct val="115000"/>
+                <a:spcPct val="125000"/>
               </a:lnSpc>
               <a:buNone/>
             </a:pPr>
             <a:r>
-              <a:rPr lang="zh-CN" altLang="en-US" sz="1400" b="1">
+              <a:rPr lang="zh-CN" altLang="en-US" sz="1300" b="1">
                 <a:solidFill>
                   <a:srgbClr val="262626"/>
                 </a:solidFill>
@@ -13592,7 +13651,7 @@
               <a:t>住户基数扩大</a:t>
             </a:r>
             <a:r>
-              <a:rPr lang="zh-CN" altLang="en-US" sz="1400" b="0">
+              <a:rPr lang="zh-CN" altLang="en-US" sz="1300" b="0">
                 <a:solidFill>
                   <a:srgbClr val="262626"/>
                 </a:solidFill>
@@ -13603,7 +13662,7 @@
               <a:t>　</a:t>
             </a:r>
             <a:r>
-              <a:rPr lang="zh-CN" altLang="en-US" sz="1400" b="1">
+              <a:rPr lang="zh-CN" altLang="en-US" sz="1300" b="1">
                 <a:solidFill>
                   <a:srgbClr val="008650"/>
                 </a:solidFill>
@@ -13613,20 +13672,20 @@
               </a:rPr>
               <a:t>−0.2pp</a:t>
             </a:r>
-            <a:endParaRPr sz="1400"/>
+            <a:endParaRPr sz="1300"/>
           </a:p>
         </p:txBody>
       </p:sp>
       <p:sp>
         <p:nvSpPr>
-          <p:cNvPr id="19" name="Rectangle 18"/>
+          <p:cNvPr id="20" name="Rectangle 19"/>
           <p:cNvSpPr/>
           <p:nvPr/>
         </p:nvSpPr>
         <p:spPr>
           <a:xfrm>
             <a:off x="6602752" y="4543044"/>
-            <a:ext cx="5311880" cy="1034796"/>
+            <a:ext cx="5311880" cy="1080516"/>
           </a:xfrm>
           <a:prstGeom prst="rect">
             <a:avLst/>
@@ -13689,14 +13748,14 @@
       </p:sp>
       <p:cxnSp>
         <p:nvCxnSpPr>
-          <p:cNvPr id="20" name="Connector 19"/>
+          <p:cNvPr id="21" name="Connector 20"/>
           <p:cNvCxnSpPr/>
           <p:nvPr/>
         </p:nvCxnSpPr>
         <p:spPr>
           <a:xfrm>
-            <a:off x="2623805" y="3888486"/>
-            <a:ext cx="457200" cy="1171956"/>
+            <a:off x="2623805" y="3865626"/>
+            <a:ext cx="457200" cy="1217676"/>
           </a:xfrm>
           <a:prstGeom prst="line">
             <a:avLst/>
@@ -13710,13 +13769,13 @@
       </p:cxnSp>
       <p:cxnSp>
         <p:nvCxnSpPr>
-          <p:cNvPr id="21" name="Connector 20"/>
+          <p:cNvPr id="22" name="Connector 21"/>
           <p:cNvCxnSpPr/>
           <p:nvPr/>
         </p:nvCxnSpPr>
         <p:spPr>
           <a:xfrm>
-            <a:off x="6145552" y="5060442"/>
+            <a:off x="6145552" y="5083302"/>
             <a:ext cx="457200" cy="0"/>
           </a:xfrm>
           <a:prstGeom prst="line">
@@ -13730,65 +13789,6 @@
           </a:ln>
         </p:spPr>
       </p:cxnSp>
-      <p:sp>
-        <p:nvSpPr>
-          <p:cNvPr id="22" name="Rectangle 21"/>
-          <p:cNvSpPr/>
-          <p:nvPr/>
-        </p:nvSpPr>
-        <p:spPr>
-          <a:xfrm>
-            <a:off x="274320" y="5760720"/>
-            <a:ext cx="11640312" cy="457200"/>
-          </a:xfrm>
-          <a:prstGeom prst="rect">
-            <a:avLst/>
-          </a:prstGeom>
-          <a:solidFill>
-            <a:srgbClr val="F1EBE9"/>
-          </a:solidFill>
-          <a:ln>
-            <a:noFill/>
-          </a:ln>
-        </p:spPr>
-        <p:txBody>
-          <a:bodyPr rtlCol="0" anchor="ctr" wrap="square" lIns="137160" tIns="82296" rIns="137160" bIns="82296">
-            <a:noAutofit/>
-          </a:bodyPr>
-          <a:lstStyle/>
-          <a:p>
-            <a:pPr algn="l" marL="0" indent="0">
-              <a:lnSpc>
-                <a:spcPct val="115000"/>
-              </a:lnSpc>
-              <a:buNone/>
-            </a:pPr>
-            <a:r>
-              <a:rPr lang="zh-CN" altLang="en-US" sz="1300" b="1">
-                <a:solidFill>
-                  <a:srgbClr val="262626"/>
-                </a:solidFill>
-                <a:latin typeface="微软雅黑"/>
-                <a:ea typeface="微软雅黑"/>
-                <a:cs typeface="微软雅黑"/>
-              </a:rPr>
-              <a:t>启示：</a:t>
-            </a:r>
-            <a:r>
-              <a:rPr lang="zh-CN" altLang="en-US" sz="1300" b="0">
-                <a:solidFill>
-                  <a:srgbClr val="262626"/>
-                </a:solidFill>
-                <a:latin typeface="微软雅黑"/>
-                <a:ea typeface="微软雅黑"/>
-                <a:cs typeface="微软雅黑"/>
-              </a:rPr>
-              <a:t>拆机贡献超过新装不足，四季度资源应向合约到期用户续约、装维质量提升倾斜，同时补齐C区、E县新建小区覆盖</a:t>
-            </a:r>
-            <a:endParaRPr sz="1300"/>
-          </a:p>
-        </p:txBody>
-      </p:sp>
       <p:sp>
         <p:nvSpPr>
           <p:cNvPr id="23" name="TextBox 22"/>
@@ -14253,7 +14253,7 @@
                 <a:ea typeface="微软雅黑"/>
                 <a:cs typeface="微软雅黑"/>
               </a:rPr>
-              <a:t>三、下一步举措</a:t>
+              <a:t>三、下一步举措：保存量、补短板、促追赶</a:t>
             </a:r>
             <a:endParaRPr sz="3000"/>
           </a:p>

--- a/examples/demo_data_analysis.pptx
+++ b/examples/demo_data_analysis.pptx
@@ -998,6 +998,7 @@
           <c:invertIfNegative val="0"/>
           <c:dPt>
             <c:idx val="8"/>
+            <c:invertIfNegative val="0"/>
             <c:spPr>
               <a:solidFill>
                 <a:srgbClr val="C00000"/>
@@ -15905,7 +15906,7 @@
           </a:ln>
         </p:spPr>
         <p:txBody>
-          <a:bodyPr rtlCol="0" anchor="ctr" wrap="square" lIns="73152" tIns="18288" rIns="235001" bIns="18288">
+          <a:bodyPr rtlCol="0" anchor="ctr" wrap="square" lIns="54864" tIns="18288" rIns="54864" bIns="18288">
             <a:noAutofit/>
           </a:bodyPr>
           <a:lstStyle/>
@@ -15955,7 +15956,7 @@
           </a:ln>
         </p:spPr>
         <p:txBody>
-          <a:bodyPr rtlCol="0" anchor="ctr" wrap="square" lIns="235001" tIns="18288" rIns="235001" bIns="18288">
+          <a:bodyPr rtlCol="0" anchor="ctr" wrap="square" lIns="54864" tIns="18288" rIns="54864" bIns="18288">
             <a:noAutofit/>
           </a:bodyPr>
           <a:lstStyle/>
@@ -16005,7 +16006,7 @@
           </a:ln>
         </p:spPr>
         <p:txBody>
-          <a:bodyPr rtlCol="0" anchor="ctr" wrap="square" lIns="235001" tIns="18288" rIns="235001" bIns="18288">
+          <a:bodyPr rtlCol="0" anchor="ctr" wrap="square" lIns="54864" tIns="18288" rIns="54864" bIns="18288">
             <a:noAutofit/>
           </a:bodyPr>
           <a:lstStyle/>
